--- a/03-build/pptx/C4_U6_docente.pptx
+++ b/03-build/pptx/C4_U6_docente.pptx
@@ -4802,7 +4802,6 @@
               <a:srgbClr val="D64550"/>
             </a:solidFill>
           </a:ln>
-          <a:effectLst/>
           <a:effectLst>
             <a:outerShdw blurRad="90000" dist="38000" dir="5400000" rotWithShape="0">
               <a:srgbClr val="20242E">
@@ -4968,7 +4967,6 @@
               <a:srgbClr val="E4E3DE"/>
             </a:solidFill>
           </a:ln>
-          <a:effectLst/>
           <a:effectLst>
             <a:outerShdw blurRad="90000" dist="38000" dir="5400000" rotWithShape="0">
               <a:srgbClr val="20242E">
@@ -5693,7 +5691,6 @@
               <a:srgbClr val="E4E3DE"/>
             </a:solidFill>
           </a:ln>
-          <a:effectLst/>
           <a:effectLst>
             <a:outerShdw blurRad="90000" dist="38000" dir="5400000" rotWithShape="0">
               <a:srgbClr val="20242E">
@@ -5837,7 +5834,6 @@
               <a:srgbClr val="E4E3DE"/>
             </a:solidFill>
           </a:ln>
-          <a:effectLst/>
           <a:effectLst>
             <a:outerShdw blurRad="90000" dist="38000" dir="5400000" rotWithShape="0">
               <a:srgbClr val="20242E">
@@ -5981,7 +5977,6 @@
               <a:srgbClr val="E4E3DE"/>
             </a:solidFill>
           </a:ln>
-          <a:effectLst/>
           <a:effectLst>
             <a:outerShdw blurRad="90000" dist="38000" dir="5400000" rotWithShape="0">
               <a:srgbClr val="20242E">
@@ -6125,7 +6120,6 @@
               <a:srgbClr val="E4E3DE"/>
             </a:solidFill>
           </a:ln>
-          <a:effectLst/>
           <a:effectLst>
             <a:outerShdw blurRad="90000" dist="38000" dir="5400000" rotWithShape="0">
               <a:srgbClr val="20242E">
@@ -6269,7 +6263,6 @@
               <a:srgbClr val="E4E3DE"/>
             </a:solidFill>
           </a:ln>
-          <a:effectLst/>
           <a:effectLst>
             <a:outerShdw blurRad="90000" dist="38000" dir="5400000" rotWithShape="0">
               <a:srgbClr val="20242E">
@@ -6413,7 +6406,6 @@
               <a:srgbClr val="E4E3DE"/>
             </a:solidFill>
           </a:ln>
-          <a:effectLst/>
           <a:effectLst>
             <a:outerShdw blurRad="90000" dist="38000" dir="5400000" rotWithShape="0">
               <a:srgbClr val="20242E">
@@ -6557,7 +6549,6 @@
               <a:srgbClr val="D64550"/>
             </a:solidFill>
           </a:ln>
-          <a:effectLst/>
           <a:effectLst>
             <a:outerShdw blurRad="90000" dist="38000" dir="5400000" rotWithShape="0">
               <a:srgbClr val="20242E">
@@ -7194,7 +7185,6 @@
               <a:srgbClr val="D64550"/>
             </a:solidFill>
           </a:ln>
-          <a:effectLst/>
           <a:effectLst>
             <a:outerShdw blurRad="90000" dist="38000" dir="5400000" rotWithShape="0">
               <a:srgbClr val="20242E">
@@ -7454,7 +7444,6 @@
               <a:srgbClr val="D64550"/>
             </a:solidFill>
           </a:ln>
-          <a:effectLst/>
           <a:effectLst>
             <a:outerShdw blurRad="90000" dist="38000" dir="5400000" rotWithShape="0">
               <a:srgbClr val="20242E">
@@ -8233,7 +8222,6 @@
               <a:srgbClr val="E4E3DE"/>
             </a:solidFill>
           </a:ln>
-          <a:effectLst/>
           <a:effectLst>
             <a:outerShdw blurRad="90000" dist="38000" dir="5400000" rotWithShape="0">
               <a:srgbClr val="20242E">
@@ -8387,7 +8375,6 @@
               <a:srgbClr val="E4E3DE"/>
             </a:solidFill>
           </a:ln>
-          <a:effectLst/>
           <a:effectLst>
             <a:outerShdw blurRad="90000" dist="38000" dir="5400000" rotWithShape="0">
               <a:srgbClr val="20242E">
@@ -8541,7 +8528,6 @@
               <a:srgbClr val="E4E3DE"/>
             </a:solidFill>
           </a:ln>
-          <a:effectLst/>
           <a:effectLst>
             <a:outerShdw blurRad="90000" dist="38000" dir="5400000" rotWithShape="0">
               <a:srgbClr val="20242E">
@@ -8695,7 +8681,6 @@
               <a:srgbClr val="E4E3DE"/>
             </a:solidFill>
           </a:ln>
-          <a:effectLst/>
           <a:effectLst>
             <a:outerShdw blurRad="90000" dist="38000" dir="5400000" rotWithShape="0">
               <a:srgbClr val="20242E">
@@ -8849,7 +8834,6 @@
               <a:srgbClr val="E4E3DE"/>
             </a:solidFill>
           </a:ln>
-          <a:effectLst/>
           <a:effectLst>
             <a:outerShdw blurRad="90000" dist="38000" dir="5400000" rotWithShape="0">
               <a:srgbClr val="20242E">
@@ -9003,7 +8987,6 @@
               <a:srgbClr val="E4E3DE"/>
             </a:solidFill>
           </a:ln>
-          <a:effectLst/>
           <a:effectLst>
             <a:outerShdw blurRad="90000" dist="38000" dir="5400000" rotWithShape="0">
               <a:srgbClr val="20242E">
@@ -9157,7 +9140,6 @@
               <a:srgbClr val="E4E3DE"/>
             </a:solidFill>
           </a:ln>
-          <a:effectLst/>
           <a:effectLst>
             <a:outerShdw blurRad="90000" dist="38000" dir="5400000" rotWithShape="0">
               <a:srgbClr val="20242E">
@@ -9311,7 +9293,6 @@
               <a:srgbClr val="E4E3DE"/>
             </a:solidFill>
           </a:ln>
-          <a:effectLst/>
           <a:effectLst>
             <a:outerShdw blurRad="90000" dist="38000" dir="5400000" rotWithShape="0">
               <a:srgbClr val="20242E">
@@ -9465,7 +9446,6 @@
               <a:srgbClr val="E4E3DE"/>
             </a:solidFill>
           </a:ln>
-          <a:effectLst/>
           <a:effectLst>
             <a:outerShdw blurRad="90000" dist="38000" dir="5400000" rotWithShape="0">
               <a:srgbClr val="20242E">
@@ -9619,7 +9599,6 @@
               <a:srgbClr val="E4E3DE"/>
             </a:solidFill>
           </a:ln>
-          <a:effectLst/>
           <a:effectLst>
             <a:outerShdw blurRad="90000" dist="38000" dir="5400000" rotWithShape="0">
               <a:srgbClr val="20242E">
@@ -9773,7 +9752,6 @@
               <a:srgbClr val="E4E3DE"/>
             </a:solidFill>
           </a:ln>
-          <a:effectLst/>
           <a:effectLst>
             <a:outerShdw blurRad="90000" dist="38000" dir="5400000" rotWithShape="0">
               <a:srgbClr val="20242E">
@@ -9927,7 +9905,6 @@
               <a:srgbClr val="E4E3DE"/>
             </a:solidFill>
           </a:ln>
-          <a:effectLst/>
           <a:effectLst>
             <a:outerShdw blurRad="90000" dist="38000" dir="5400000" rotWithShape="0">
               <a:srgbClr val="20242E">
@@ -10081,7 +10058,6 @@
               <a:srgbClr val="D64550"/>
             </a:solidFill>
           </a:ln>
-          <a:effectLst/>
           <a:effectLst>
             <a:outerShdw blurRad="90000" dist="38000" dir="5400000" rotWithShape="0">
               <a:srgbClr val="20242E">
@@ -10235,7 +10211,6 @@
               <a:srgbClr val="D64550"/>
             </a:solidFill>
           </a:ln>
-          <a:effectLst/>
           <a:effectLst>
             <a:outerShdw blurRad="90000" dist="38000" dir="5400000" rotWithShape="0">
               <a:srgbClr val="20242E">
@@ -10872,7 +10847,6 @@
               <a:srgbClr val="E4E3DE"/>
             </a:solidFill>
           </a:ln>
-          <a:effectLst/>
           <a:effectLst>
             <a:outerShdw blurRad="90000" dist="38000" dir="5400000" rotWithShape="0">
               <a:srgbClr val="20242E">
@@ -11148,7 +11122,6 @@
               <a:srgbClr val="D64550"/>
             </a:solidFill>
           </a:ln>
-          <a:effectLst/>
           <a:effectLst>
             <a:outerShdw blurRad="90000" dist="38000" dir="5400000" rotWithShape="0">
               <a:srgbClr val="20242E">
@@ -12608,7 +12581,6 @@
               <a:srgbClr val="E4E3DE"/>
             </a:solidFill>
           </a:ln>
-          <a:effectLst/>
           <a:effectLst>
             <a:outerShdw blurRad="90000" dist="38000" dir="5400000" rotWithShape="0">
               <a:srgbClr val="20242E">
@@ -12777,7 +12749,6 @@
               <a:srgbClr val="E4E3DE"/>
             </a:solidFill>
           </a:ln>
-          <a:effectLst/>
           <a:effectLst>
             <a:outerShdw blurRad="90000" dist="38000" dir="5400000" rotWithShape="0">
               <a:srgbClr val="20242E">
@@ -12946,7 +12917,6 @@
               <a:srgbClr val="E4E3DE"/>
             </a:solidFill>
           </a:ln>
-          <a:effectLst/>
           <a:effectLst>
             <a:outerShdw blurRad="90000" dist="38000" dir="5400000" rotWithShape="0">
               <a:srgbClr val="20242E">
@@ -13115,7 +13085,6 @@
               <a:srgbClr val="E4E3DE"/>
             </a:solidFill>
           </a:ln>
-          <a:effectLst/>
           <a:effectLst>
             <a:outerShdw blurRad="90000" dist="38000" dir="5400000" rotWithShape="0">
               <a:srgbClr val="20242E">
@@ -13284,7 +13253,6 @@
               <a:srgbClr val="E4E3DE"/>
             </a:solidFill>
           </a:ln>
-          <a:effectLst/>
           <a:effectLst>
             <a:outerShdw blurRad="90000" dist="38000" dir="5400000" rotWithShape="0">
               <a:srgbClr val="20242E">
@@ -13453,7 +13421,6 @@
               <a:srgbClr val="E4E3DE"/>
             </a:solidFill>
           </a:ln>
-          <a:effectLst/>
           <a:effectLst>
             <a:outerShdw blurRad="90000" dist="38000" dir="5400000" rotWithShape="0">
               <a:srgbClr val="20242E">
@@ -13622,7 +13589,6 @@
               <a:srgbClr val="E4E3DE"/>
             </a:solidFill>
           </a:ln>
-          <a:effectLst/>
           <a:effectLst>
             <a:outerShdw blurRad="90000" dist="38000" dir="5400000" rotWithShape="0">
               <a:srgbClr val="20242E">
@@ -13791,7 +13757,6 @@
               <a:srgbClr val="E4E3DE"/>
             </a:solidFill>
           </a:ln>
-          <a:effectLst/>
           <a:effectLst>
             <a:outerShdw blurRad="90000" dist="38000" dir="5400000" rotWithShape="0">
               <a:srgbClr val="20242E">
@@ -13960,7 +13925,6 @@
               <a:srgbClr val="E4E3DE"/>
             </a:solidFill>
           </a:ln>
-          <a:effectLst/>
           <a:effectLst>
             <a:outerShdw blurRad="90000" dist="38000" dir="5400000" rotWithShape="0">
               <a:srgbClr val="20242E">
@@ -14709,7 +14673,6 @@
               <a:srgbClr val="E4E3DE"/>
             </a:solidFill>
           </a:ln>
-          <a:effectLst/>
           <a:effectLst>
             <a:outerShdw blurRad="90000" dist="38000" dir="5400000" rotWithShape="0">
               <a:srgbClr val="20242E">
@@ -15564,7 +15527,6 @@
               <a:srgbClr val="D64550"/>
             </a:solidFill>
           </a:ln>
-          <a:effectLst/>
           <a:effectLst>
             <a:outerShdw blurRad="90000" dist="38000" dir="5400000" rotWithShape="0">
               <a:srgbClr val="20242E">
@@ -16313,7 +16275,6 @@
               <a:srgbClr val="E4E3DE"/>
             </a:solidFill>
           </a:ln>
-          <a:effectLst/>
           <a:effectLst>
             <a:outerShdw blurRad="90000" dist="38000" dir="5400000" rotWithShape="0">
               <a:srgbClr val="20242E">
@@ -16524,7 +16485,6 @@
               <a:srgbClr val="E4E3DE"/>
             </a:solidFill>
           </a:ln>
-          <a:effectLst/>
           <a:effectLst>
             <a:outerShdw blurRad="90000" dist="38000" dir="5400000" rotWithShape="0">
               <a:srgbClr val="20242E">
@@ -16735,7 +16695,6 @@
               <a:srgbClr val="D64550"/>
             </a:solidFill>
           </a:ln>
-          <a:effectLst/>
           <a:effectLst>
             <a:outerShdw blurRad="90000" dist="38000" dir="5400000" rotWithShape="0">
               <a:srgbClr val="20242E">
@@ -17651,7 +17610,6 @@
               <a:srgbClr val="E4E3DE"/>
             </a:solidFill>
           </a:ln>
-          <a:effectLst/>
           <a:effectLst>
             <a:outerShdw blurRad="90000" dist="38000" dir="5400000" rotWithShape="0">
               <a:srgbClr val="20242E">
@@ -18021,7 +17979,6 @@
               <a:srgbClr val="E4E3DE"/>
             </a:solidFill>
           </a:ln>
-          <a:effectLst/>
           <a:effectLst>
             <a:outerShdw blurRad="90000" dist="38000" dir="5400000" rotWithShape="0">
               <a:srgbClr val="20242E">
@@ -18391,7 +18348,6 @@
               <a:srgbClr val="E4E3DE"/>
             </a:solidFill>
           </a:ln>
-          <a:effectLst/>
           <a:effectLst>
             <a:outerShdw blurRad="90000" dist="38000" dir="5400000" rotWithShape="0">
               <a:srgbClr val="20242E">
@@ -19289,7 +19245,6 @@
               <a:srgbClr val="D64550"/>
             </a:solidFill>
           </a:ln>
-          <a:effectLst/>
           <a:effectLst>
             <a:outerShdw blurRad="90000" dist="38000" dir="5400000" rotWithShape="0">
               <a:srgbClr val="20242E">
@@ -19659,7 +19614,6 @@
               <a:srgbClr val="E4E3DE"/>
             </a:solidFill>
           </a:ln>
-          <a:effectLst/>
           <a:effectLst>
             <a:outerShdw blurRad="90000" dist="38000" dir="5400000" rotWithShape="0">
               <a:srgbClr val="20242E">
@@ -21111,7 +21065,6 @@
               <a:srgbClr val="E4E3DE"/>
             </a:solidFill>
           </a:ln>
-          <a:effectLst/>
           <a:effectLst>
             <a:outerShdw blurRad="90000" dist="38000" dir="5400000" rotWithShape="0">
               <a:srgbClr val="20242E">
@@ -21589,7 +21542,6 @@
               <a:srgbClr val="D64550"/>
             </a:solidFill>
           </a:ln>
-          <a:effectLst/>
           <a:effectLst>
             <a:outerShdw blurRad="90000" dist="38000" dir="5400000" rotWithShape="0">
               <a:srgbClr val="20242E">
@@ -22476,7 +22428,6 @@
               <a:srgbClr val="E4E3DE"/>
             </a:solidFill>
           </a:ln>
-          <a:effectLst/>
           <a:effectLst>
             <a:outerShdw blurRad="90000" dist="38000" dir="5400000" rotWithShape="0">
               <a:srgbClr val="20242E">
@@ -22765,7 +22716,6 @@
               <a:srgbClr val="D64550"/>
             </a:solidFill>
           </a:ln>
-          <a:effectLst/>
           <a:effectLst>
             <a:outerShdw blurRad="90000" dist="38000" dir="5400000" rotWithShape="0">
               <a:srgbClr val="20242E">
@@ -23039,7 +22989,6 @@
               <a:srgbClr val="D64550"/>
             </a:solidFill>
           </a:ln>
-          <a:effectLst/>
           <a:effectLst>
             <a:outerShdw blurRad="90000" dist="38000" dir="5400000" rotWithShape="0">
               <a:srgbClr val="20242E">
@@ -24152,7 +24101,6 @@
               <a:srgbClr val="E4E3DE"/>
             </a:solidFill>
           </a:ln>
-          <a:effectLst/>
           <a:effectLst>
             <a:outerShdw blurRad="90000" dist="38000" dir="5400000" rotWithShape="0">
               <a:srgbClr val="20242E">
